--- a/internal/dettest/testdata/goldens/pptx-master/expected.pptx
+++ b/internal/dettest/testdata/goldens/pptx-master/expected.pptx
@@ -511,6 +511,96 @@
           <a:latin typeface="+mn-lt"/>
         </a:defRPr>
       </a:lvl3pPr>
+      <a:lvl4pPr marL="609600" algn="l">
+        <a:lnSpc>
+          <a:spcPct val="120000"/>
+        </a:lnSpc>
+        <a:spcBef>
+          <a:spcPts val="600"/>
+        </a:spcBef>
+        <a:buNone/>
+        <a:defRPr sz="1600">
+          <a:solidFill>
+            <a:schemeClr val="tx1"/>
+          </a:solidFill>
+          <a:latin typeface="+mn-lt"/>
+        </a:defRPr>
+      </a:lvl4pPr>
+      <a:lvl5pPr marL="812800" algn="l">
+        <a:lnSpc>
+          <a:spcPct val="120000"/>
+        </a:lnSpc>
+        <a:spcBef>
+          <a:spcPts val="600"/>
+        </a:spcBef>
+        <a:buNone/>
+        <a:defRPr sz="1600">
+          <a:solidFill>
+            <a:schemeClr val="tx1"/>
+          </a:solidFill>
+          <a:latin typeface="+mn-lt"/>
+        </a:defRPr>
+      </a:lvl5pPr>
+      <a:lvl6pPr marL="1016000" algn="l">
+        <a:lnSpc>
+          <a:spcPct val="120000"/>
+        </a:lnSpc>
+        <a:spcBef>
+          <a:spcPts val="600"/>
+        </a:spcBef>
+        <a:buNone/>
+        <a:defRPr sz="1600">
+          <a:solidFill>
+            <a:schemeClr val="tx1"/>
+          </a:solidFill>
+          <a:latin typeface="+mn-lt"/>
+        </a:defRPr>
+      </a:lvl6pPr>
+      <a:lvl7pPr marL="1219200" algn="l">
+        <a:lnSpc>
+          <a:spcPct val="120000"/>
+        </a:lnSpc>
+        <a:spcBef>
+          <a:spcPts val="600"/>
+        </a:spcBef>
+        <a:buNone/>
+        <a:defRPr sz="1600">
+          <a:solidFill>
+            <a:schemeClr val="tx1"/>
+          </a:solidFill>
+          <a:latin typeface="+mn-lt"/>
+        </a:defRPr>
+      </a:lvl7pPr>
+      <a:lvl8pPr marL="1422400" algn="l">
+        <a:lnSpc>
+          <a:spcPct val="120000"/>
+        </a:lnSpc>
+        <a:spcBef>
+          <a:spcPts val="600"/>
+        </a:spcBef>
+        <a:buNone/>
+        <a:defRPr sz="1600">
+          <a:solidFill>
+            <a:schemeClr val="tx1"/>
+          </a:solidFill>
+          <a:latin typeface="+mn-lt"/>
+        </a:defRPr>
+      </a:lvl8pPr>
+      <a:lvl9pPr marL="1625600" algn="l">
+        <a:lnSpc>
+          <a:spcPct val="120000"/>
+        </a:lnSpc>
+        <a:spcBef>
+          <a:spcPts val="600"/>
+        </a:spcBef>
+        <a:buNone/>
+        <a:defRPr sz="1600">
+          <a:solidFill>
+            <a:schemeClr val="tx1"/>
+          </a:solidFill>
+          <a:latin typeface="+mn-lt"/>
+        </a:defRPr>
+      </a:lvl9pPr>
     </p:bodyStyle>
     <p:otherStyle>
       <a:lvl1pPr algn="l">
